--- a/apps/resources/bundled_files/6-klass-bolunuu-belgileri-sabak-v2.pptx
+++ b/apps/resources/bundled_files/6-klass-bolunuu-belgileri-sabak-v2.pptx
@@ -5196,7 +5196,7 @@
                 </a:solidFill>
                 <a:latin typeface="PT Sans"/>
               </a:rPr>
-              <a:t>6-класс · Математика</a:t>
+              <a:t/>
             </a:r>
           </a:p>
         </p:txBody>
@@ -5688,7 +5688,7 @@
                 </a:solidFill>
                 <a:latin typeface="PT Sans"/>
               </a:rPr>
-              <a:t>6-класс ›</a:t>
+              <a:t/>
             </a:r>
           </a:p>
           <a:p>
@@ -6621,7 +6621,7 @@
                 </a:solidFill>
                 <a:latin typeface="PT Sans"/>
               </a:rPr>
-              <a:t>6-класс ›</a:t>
+              <a:t/>
             </a:r>
           </a:p>
           <a:p>
@@ -12205,7 +12205,7 @@
                 </a:solidFill>
                 <a:latin typeface="PT Sans"/>
               </a:rPr>
-              <a:t>6-класс ›</a:t>
+              <a:t/>
             </a:r>
           </a:p>
           <a:p>
@@ -18406,7 +18406,7 @@
                 </a:solidFill>
                 <a:latin typeface="PT Sans"/>
               </a:rPr>
-              <a:t>6-класс ›</a:t>
+              <a:t/>
             </a:r>
           </a:p>
           <a:p>
@@ -19736,7 +19736,7 @@
                 </a:solidFill>
                 <a:latin typeface="PT Sans"/>
               </a:rPr>
-              <a:t>6-класс ›</a:t>
+              <a:t/>
             </a:r>
           </a:p>
           <a:p>
@@ -20448,7 +20448,7 @@
                 </a:solidFill>
                 <a:latin typeface="PT Sans"/>
               </a:rPr>
-              <a:t>6-класс ›</a:t>
+              <a:t/>
             </a:r>
           </a:p>
           <a:p>
@@ -21199,7 +21199,7 @@
                 </a:solidFill>
                 <a:latin typeface="PT Sans"/>
               </a:rPr>
-              <a:t>6-класс ›</a:t>
+              <a:t/>
             </a:r>
           </a:p>
           <a:p>
@@ -22865,7 +22865,7 @@
                 </a:solidFill>
                 <a:latin typeface="PT Sans"/>
               </a:rPr>
-              <a:t>6-класс ›</a:t>
+              <a:t/>
             </a:r>
           </a:p>
           <a:p>
@@ -23949,7 +23949,7 @@
                 </a:solidFill>
                 <a:latin typeface="PT Sans"/>
               </a:rPr>
-              <a:t>6-класс ›</a:t>
+              <a:t/>
             </a:r>
           </a:p>
           <a:p>
@@ -25479,7 +25479,7 @@
                 </a:solidFill>
                 <a:latin typeface="PT Sans"/>
               </a:rPr>
-              <a:t>6-класс ›</a:t>
+              <a:t/>
             </a:r>
           </a:p>
           <a:p>
@@ -27954,7 +27954,7 @@
                 </a:solidFill>
                 <a:latin typeface="PT Sans"/>
               </a:rPr>
-              <a:t>6-класс ›</a:t>
+              <a:t/>
             </a:r>
           </a:p>
           <a:p>
@@ -29231,7 +29231,7 @@
                 </a:solidFill>
                 <a:latin typeface="PT Sans"/>
               </a:rPr>
-              <a:t>6-класс ›</a:t>
+              <a:t/>
             </a:r>
           </a:p>
           <a:p>
@@ -30659,7 +30659,7 @@
                 </a:solidFill>
                 <a:latin typeface="PT Sans"/>
               </a:rPr>
-              <a:t>6-класс ›</a:t>
+              <a:t/>
             </a:r>
           </a:p>
           <a:p>
@@ -32115,7 +32115,7 @@
                 </a:solidFill>
                 <a:latin typeface="PT Sans"/>
               </a:rPr>
-              <a:t>6-класс ›</a:t>
+              <a:t/>
             </a:r>
           </a:p>
           <a:p>
@@ -33569,7 +33569,7 @@
                 </a:solidFill>
                 <a:latin typeface="PT Sans"/>
               </a:rPr>
-              <a:t>6-класс ›</a:t>
+              <a:t/>
             </a:r>
           </a:p>
           <a:p>
@@ -34369,7 +34369,7 @@
                 </a:solidFill>
                 <a:latin typeface="PT Sans"/>
               </a:rPr>
-              <a:t>6-класс ›</a:t>
+              <a:t/>
             </a:r>
           </a:p>
           <a:p>
@@ -35210,7 +35210,7 @@
                 </a:solidFill>
                 <a:latin typeface="PT Sans"/>
               </a:rPr>
-              <a:t>6-класс ›</a:t>
+              <a:t/>
             </a:r>
           </a:p>
           <a:p>
@@ -36159,7 +36159,7 @@
                 </a:solidFill>
                 <a:latin typeface="PT Sans"/>
               </a:rPr>
-              <a:t>6-класс ›</a:t>
+              <a:t/>
             </a:r>
           </a:p>
           <a:p>
@@ -37613,7 +37613,7 @@
                 </a:solidFill>
                 <a:latin typeface="PT Sans"/>
               </a:rPr>
-              <a:t>6-класс ›</a:t>
+              <a:t/>
             </a:r>
           </a:p>
           <a:p>
@@ -38359,7 +38359,7 @@
                 </a:solidFill>
                 <a:latin typeface="PT Sans"/>
               </a:rPr>
-              <a:t>6-класс ›</a:t>
+              <a:t/>
             </a:r>
           </a:p>
           <a:p>
@@ -39167,7 +39167,7 @@
                 </a:solidFill>
                 <a:latin typeface="PT Sans"/>
               </a:rPr>
-              <a:t>6-класс ›</a:t>
+              <a:t/>
             </a:r>
           </a:p>
           <a:p>
@@ -40358,7 +40358,7 @@
                 </a:solidFill>
                 <a:latin typeface="PT Sans"/>
               </a:rPr>
-              <a:t>6-класс ›</a:t>
+              <a:t/>
             </a:r>
           </a:p>
           <a:p>
@@ -41537,7 +41537,7 @@
                 </a:solidFill>
                 <a:latin typeface="PT Sans"/>
               </a:rPr>
-              <a:t>6-класс ›</a:t>
+              <a:t/>
             </a:r>
           </a:p>
           <a:p>
@@ -41718,7 +41718,7 @@
                 </a:solidFill>
                 <a:latin typeface="PT Sans"/>
               </a:rPr>
-              <a:t>4-класс</a:t>
+              <a:t/>
             </a:r>
           </a:p>
         </p:txBody>
@@ -41898,7 +41898,7 @@
                 </a:solidFill>
                 <a:latin typeface="PT Sans"/>
               </a:rPr>
-              <a:t>5-класс</a:t>
+              <a:t/>
             </a:r>
           </a:p>
         </p:txBody>
@@ -42078,7 +42078,7 @@
                 </a:solidFill>
                 <a:latin typeface="PT Sans"/>
               </a:rPr>
-              <a:t>6-класс</a:t>
+              <a:t/>
             </a:r>
           </a:p>
         </p:txBody>
@@ -42314,7 +42314,7 @@
                 </a:solidFill>
                 <a:latin typeface="PT Sans"/>
               </a:rPr>
-              <a:t>7-класс</a:t>
+              <a:t/>
             </a:r>
           </a:p>
         </p:txBody>
@@ -42715,7 +42715,7 @@
                 </a:solidFill>
                 <a:latin typeface="PT Sans"/>
               </a:rPr>
-              <a:t>6-класс ›</a:t>
+              <a:t/>
             </a:r>
           </a:p>
           <a:p>
@@ -43863,7 +43863,7 @@
                 </a:solidFill>
                 <a:latin typeface="PT Sans"/>
               </a:rPr>
-              <a:t>6-класс ›</a:t>
+              <a:t/>
             </a:r>
           </a:p>
           <a:p>

--- a/apps/resources/bundled_files/6-klass-bolunuu-belgileri-sabak-v2.pptx
+++ b/apps/resources/bundled_files/6-klass-bolunuu-belgileri-sabak-v2.pptx
@@ -1582,7 +1582,7 @@
           <a:lstStyle/>
           <a:p>
             <a:r>
-              <a:t>Ой жүгүртүү маданияты (Wenxi Lee, 2.6).</a:t>
+              <a:t>Ой жүгүртүү маданияты (Wenxi Lee, 2,6).</a:t>
             </a:r>
           </a:p>
         </p:txBody>
